--- a/restavraciya-obektov-E.pptx
+++ b/restavraciya-obektov-E.pptx
@@ -20,7 +20,7 @@
     <p:sldId id="268" r:id="rId19"/>
     <p:sldId id="269" r:id="rId20"/>
   </p:sldIdLst>
-  <p:sldSz cx="12192000" cy="6858000" type="screen4x3"/>
+  <p:sldSz cx="12192000" cy="6858000"/>
   <p:notesSz cx="6858000" cy="9144000"/>
   <p:defaultTextStyle>
     <a:defPPr>
